--- a/dist/hermes/artifacts/pptx/maslow-brand-starter.pptx
+++ b/dist/hermes/artifacts/pptx/maslow-brand-starter.pptx
@@ -2,19 +2,19 @@
 <file path=ppt/presentation.xml><?xml version="1.0" encoding="utf-8"?>
 <p:presentation xmlns:p="http://schemas.openxmlformats.org/presentationml/2006/main">
   <p:sldMasterIdLst>
-    <p:sldMasterId xmlns:r="http://schemas.openxmlformats.org/officeDocument/2006/relationships" id="2147483648" r:id="R13215d2ea8a84c87"/>
-    <p:sldMasterId xmlns:r="http://schemas.openxmlformats.org/officeDocument/2006/relationships" id="2147483650" r:id="R245d0709062441e0"/>
+    <p:sldMasterId xmlns:r="http://schemas.openxmlformats.org/officeDocument/2006/relationships" id="2147483648" r:id="rId9"/>
+    <p:sldMasterId xmlns:r="http://schemas.openxmlformats.org/officeDocument/2006/relationships" id="2147483650" r:id="rId10"/>
   </p:sldMasterIdLst>
   <p:notesMasterIdLst>
-    <p:notesMasterId xmlns:r="http://schemas.openxmlformats.org/officeDocument/2006/relationships" r:id="R558382e786ed4a34"/>
+    <p:notesMasterId xmlns:r="http://schemas.openxmlformats.org/officeDocument/2006/relationships" r:id="rId1"/>
   </p:notesMasterIdLst>
   <p:sldIdLst>
-    <p:sldId xmlns:r="http://schemas.openxmlformats.org/officeDocument/2006/relationships" id="256" r:id="R326351ff680b4e95"/>
-    <p:sldId xmlns:r="http://schemas.openxmlformats.org/officeDocument/2006/relationships" id="257" r:id="Rc71598d59a3f47ba"/>
-    <p:sldId xmlns:r="http://schemas.openxmlformats.org/officeDocument/2006/relationships" id="258" r:id="R563c14717ac942f3"/>
-    <p:sldId xmlns:r="http://schemas.openxmlformats.org/officeDocument/2006/relationships" id="259" r:id="R9e8785e836864ea0"/>
-    <p:sldId xmlns:r="http://schemas.openxmlformats.org/officeDocument/2006/relationships" id="260" r:id="R3a229730eab24a20"/>
-    <p:sldId xmlns:r="http://schemas.openxmlformats.org/officeDocument/2006/relationships" id="261" r:id="R8d3dade39a08428d"/>
+    <p:sldId xmlns:r="http://schemas.openxmlformats.org/officeDocument/2006/relationships" id="256" r:id="rId3"/>
+    <p:sldId xmlns:r="http://schemas.openxmlformats.org/officeDocument/2006/relationships" id="257" r:id="rId4"/>
+    <p:sldId xmlns:r="http://schemas.openxmlformats.org/officeDocument/2006/relationships" id="258" r:id="rId5"/>
+    <p:sldId xmlns:r="http://schemas.openxmlformats.org/officeDocument/2006/relationships" id="259" r:id="rId6"/>
+    <p:sldId xmlns:r="http://schemas.openxmlformats.org/officeDocument/2006/relationships" id="260" r:id="rId7"/>
+    <p:sldId xmlns:r="http://schemas.openxmlformats.org/officeDocument/2006/relationships" id="261" r:id="rId8"/>
   </p:sldIdLst>
   <p:sldSz cx="12192000" cy="6858000"/>
   <p:notesSz cx="6858000" cy="9144000"/>
@@ -862,7 +862,7 @@
           <p:cNvPr id="2" name="01 Title background">
             <a:extLst xmlns:a="http://schemas.openxmlformats.org/drawingml/2006/main">
               <a:ext uri="{FF2B5EF4-FFF2-40B4-BE49-F238E27FC236}">
-                <a16:creationId xmlns:a16="http://schemas.microsoft.com/office/drawing/2014/main" id="{EB4D7C85-668A-41D2-AC3D-60E9E01E5E29}"/>
+                <a16:creationId xmlns:a16="http://schemas.microsoft.com/office/drawing/2014/main" id="{310190F3-A5DF-55A3-B6C0-43AC89EE7FF6}"/>
               </a:ext>
             </a:extLst>
           </p:cNvPr>
@@ -893,7 +893,7 @@
           <p:cNvPr id="3" name="01 Title title 0">
             <a:extLst xmlns:a="http://schemas.openxmlformats.org/drawingml/2006/main">
               <a:ext uri="{FF2B5EF4-FFF2-40B4-BE49-F238E27FC236}">
-                <a16:creationId xmlns:a16="http://schemas.microsoft.com/office/drawing/2014/main" id="{E7B14ACC-DA14-495F-BE0B-E608E22D5082}"/>
+                <a16:creationId xmlns:a16="http://schemas.microsoft.com/office/drawing/2014/main" id="{BF3ECDF5-084E-5F6F-836E-EAA19091915D}"/>
               </a:ext>
             </a:extLst>
           </p:cNvPr>
@@ -925,7 +925,7 @@
           <p:cNvPr id="4" name="01 Title subtitle 0">
             <a:extLst xmlns:a="http://schemas.openxmlformats.org/drawingml/2006/main">
               <a:ext uri="{FF2B5EF4-FFF2-40B4-BE49-F238E27FC236}">
-                <a16:creationId xmlns:a16="http://schemas.microsoft.com/office/drawing/2014/main" id="{6F58992B-1316-470D-AB79-42B4F564DBFA}"/>
+                <a16:creationId xmlns:a16="http://schemas.microsoft.com/office/drawing/2014/main" id="{9790C2EA-1A6D-5ADB-A006-DB6933ACC03E}"/>
               </a:ext>
             </a:extLst>
           </p:cNvPr>
@@ -974,7 +974,7 @@
           <p:cNvPr id="2" name="02 Section background">
             <a:extLst xmlns:a="http://schemas.openxmlformats.org/drawingml/2006/main">
               <a:ext uri="{FF2B5EF4-FFF2-40B4-BE49-F238E27FC236}">
-                <a16:creationId xmlns:a16="http://schemas.microsoft.com/office/drawing/2014/main" id="{F178C535-3BBC-4018-ABAF-7C6CAC386C6F}"/>
+                <a16:creationId xmlns:a16="http://schemas.microsoft.com/office/drawing/2014/main" id="{3E2C7BFB-1C52-56BF-B6DE-6D4D2A8F3357}"/>
               </a:ext>
             </a:extLst>
           </p:cNvPr>
@@ -1005,7 +1005,7 @@
           <p:cNvPr id="3" name="02 Section title 0">
             <a:extLst xmlns:a="http://schemas.openxmlformats.org/drawingml/2006/main">
               <a:ext uri="{FF2B5EF4-FFF2-40B4-BE49-F238E27FC236}">
-                <a16:creationId xmlns:a16="http://schemas.microsoft.com/office/drawing/2014/main" id="{36DFB383-5A08-41E7-AE80-7C1B859FE15D}"/>
+                <a16:creationId xmlns:a16="http://schemas.microsoft.com/office/drawing/2014/main" id="{95004533-AA10-5A36-8A0C-F418CF157EA6}"/>
               </a:ext>
             </a:extLst>
           </p:cNvPr>
@@ -1037,7 +1037,7 @@
           <p:cNvPr id="4" name="02 Section subtitle 0">
             <a:extLst xmlns:a="http://schemas.openxmlformats.org/drawingml/2006/main">
               <a:ext uri="{FF2B5EF4-FFF2-40B4-BE49-F238E27FC236}">
-                <a16:creationId xmlns:a16="http://schemas.microsoft.com/office/drawing/2014/main" id="{D5EDC97B-F597-4050-B7B2-1D23C17B2DF0}"/>
+                <a16:creationId xmlns:a16="http://schemas.microsoft.com/office/drawing/2014/main" id="{66DAC599-2E9B-5E94-AD7D-6DF459FC0750}"/>
               </a:ext>
             </a:extLst>
           </p:cNvPr>
@@ -1086,7 +1086,7 @@
           <p:cNvPr id="2" name="03 Content background">
             <a:extLst xmlns:a="http://schemas.openxmlformats.org/drawingml/2006/main">
               <a:ext uri="{FF2B5EF4-FFF2-40B4-BE49-F238E27FC236}">
-                <a16:creationId xmlns:a16="http://schemas.microsoft.com/office/drawing/2014/main" id="{731A846E-CE61-4CA7-B193-5139979D9DEC}"/>
+                <a16:creationId xmlns:a16="http://schemas.microsoft.com/office/drawing/2014/main" id="{D87BB0D0-8F4A-525D-A2AB-E1D33D509886}"/>
               </a:ext>
             </a:extLst>
           </p:cNvPr>
@@ -1117,7 +1117,7 @@
           <p:cNvPr id="3" name="03 Content title 0">
             <a:extLst xmlns:a="http://schemas.openxmlformats.org/drawingml/2006/main">
               <a:ext uri="{FF2B5EF4-FFF2-40B4-BE49-F238E27FC236}">
-                <a16:creationId xmlns:a16="http://schemas.microsoft.com/office/drawing/2014/main" id="{15198248-69D5-4C64-A434-0B5CFAD3618E}"/>
+                <a16:creationId xmlns:a16="http://schemas.microsoft.com/office/drawing/2014/main" id="{ED38757D-C3CD-5DCE-871E-ACCF23CFA5C1}"/>
               </a:ext>
             </a:extLst>
           </p:cNvPr>
@@ -1149,7 +1149,7 @@
           <p:cNvPr id="4" name="03 Content body 0">
             <a:extLst xmlns:a="http://schemas.openxmlformats.org/drawingml/2006/main">
               <a:ext uri="{FF2B5EF4-FFF2-40B4-BE49-F238E27FC236}">
-                <a16:creationId xmlns:a16="http://schemas.microsoft.com/office/drawing/2014/main" id="{5E6F8993-86C8-4F4C-9DBB-BD42D6ACE205}"/>
+                <a16:creationId xmlns:a16="http://schemas.microsoft.com/office/drawing/2014/main" id="{2BC6FFDF-9EB8-5016-893F-129CF56C0857}"/>
               </a:ext>
             </a:extLst>
           </p:cNvPr>
@@ -1198,7 +1198,7 @@
           <p:cNvPr id="2" name="04 Evidence background">
             <a:extLst xmlns:a="http://schemas.openxmlformats.org/drawingml/2006/main">
               <a:ext uri="{FF2B5EF4-FFF2-40B4-BE49-F238E27FC236}">
-                <a16:creationId xmlns:a16="http://schemas.microsoft.com/office/drawing/2014/main" id="{0758F6B5-C353-4774-9154-FACCD766D7A4}"/>
+                <a16:creationId xmlns:a16="http://schemas.microsoft.com/office/drawing/2014/main" id="{7FD1B23C-9D80-5101-874D-7B6D1874093F}"/>
               </a:ext>
             </a:extLst>
           </p:cNvPr>
@@ -1229,7 +1229,7 @@
           <p:cNvPr id="3" name="04 Evidence title 0">
             <a:extLst xmlns:a="http://schemas.openxmlformats.org/drawingml/2006/main">
               <a:ext uri="{FF2B5EF4-FFF2-40B4-BE49-F238E27FC236}">
-                <a16:creationId xmlns:a16="http://schemas.microsoft.com/office/drawing/2014/main" id="{B8C182F0-C8B0-4068-9101-A7E8A11BF020}"/>
+                <a16:creationId xmlns:a16="http://schemas.microsoft.com/office/drawing/2014/main" id="{AC01EC95-7E27-5997-9017-60B8B43DC4EA}"/>
               </a:ext>
             </a:extLst>
           </p:cNvPr>
@@ -1261,7 +1261,7 @@
           <p:cNvPr id="4" name="04 Evidence body 0">
             <a:extLst xmlns:a="http://schemas.openxmlformats.org/drawingml/2006/main">
               <a:ext uri="{FF2B5EF4-FFF2-40B4-BE49-F238E27FC236}">
-                <a16:creationId xmlns:a16="http://schemas.microsoft.com/office/drawing/2014/main" id="{A47BF7E9-D575-4C7D-944C-8F4F99C472E6}"/>
+                <a16:creationId xmlns:a16="http://schemas.microsoft.com/office/drawing/2014/main" id="{718D0A01-D416-5145-BB47-B3087DCC0152}"/>
               </a:ext>
             </a:extLst>
           </p:cNvPr>
@@ -1310,7 +1310,7 @@
           <p:cNvPr id="2" name="05 Quote background">
             <a:extLst xmlns:a="http://schemas.openxmlformats.org/drawingml/2006/main">
               <a:ext uri="{FF2B5EF4-FFF2-40B4-BE49-F238E27FC236}">
-                <a16:creationId xmlns:a16="http://schemas.microsoft.com/office/drawing/2014/main" id="{D598B5B1-A1A4-4526-9394-CF2FF0E67653}"/>
+                <a16:creationId xmlns:a16="http://schemas.microsoft.com/office/drawing/2014/main" id="{EA03A625-C576-50B9-8010-5A09FC9133B1}"/>
               </a:ext>
             </a:extLst>
           </p:cNvPr>
@@ -1341,7 +1341,7 @@
           <p:cNvPr id="3" name="05 Quote title 0">
             <a:extLst xmlns:a="http://schemas.openxmlformats.org/drawingml/2006/main">
               <a:ext uri="{FF2B5EF4-FFF2-40B4-BE49-F238E27FC236}">
-                <a16:creationId xmlns:a16="http://schemas.microsoft.com/office/drawing/2014/main" id="{69C3E6D2-ECC0-43B0-B6AC-B8F62C781ACC}"/>
+                <a16:creationId xmlns:a16="http://schemas.microsoft.com/office/drawing/2014/main" id="{02AE9DC2-2DBC-50F9-94A3-242DB207F66C}"/>
               </a:ext>
             </a:extLst>
           </p:cNvPr>
@@ -1373,7 +1373,7 @@
           <p:cNvPr id="4" name="05 Quote subtitle 0">
             <a:extLst xmlns:a="http://schemas.openxmlformats.org/drawingml/2006/main">
               <a:ext uri="{FF2B5EF4-FFF2-40B4-BE49-F238E27FC236}">
-                <a16:creationId xmlns:a16="http://schemas.microsoft.com/office/drawing/2014/main" id="{DBA794BD-1D76-43E0-8F8E-D524533F188F}"/>
+                <a16:creationId xmlns:a16="http://schemas.microsoft.com/office/drawing/2014/main" id="{5EA47EC0-2F7A-5850-81B7-707BBB286343}"/>
               </a:ext>
             </a:extLst>
           </p:cNvPr>
@@ -1422,7 +1422,7 @@
           <p:cNvPr id="2" name="06 Closing background">
             <a:extLst xmlns:a="http://schemas.openxmlformats.org/drawingml/2006/main">
               <a:ext uri="{FF2B5EF4-FFF2-40B4-BE49-F238E27FC236}">
-                <a16:creationId xmlns:a16="http://schemas.microsoft.com/office/drawing/2014/main" id="{C933616D-92B3-47FD-8BF4-E781A2E8435B}"/>
+                <a16:creationId xmlns:a16="http://schemas.microsoft.com/office/drawing/2014/main" id="{EAD0AA3D-F242-5E86-9CAC-5B3BCEB5B2D3}"/>
               </a:ext>
             </a:extLst>
           </p:cNvPr>
@@ -1453,7 +1453,7 @@
           <p:cNvPr id="3" name="06 Closing title 0">
             <a:extLst xmlns:a="http://schemas.openxmlformats.org/drawingml/2006/main">
               <a:ext uri="{FF2B5EF4-FFF2-40B4-BE49-F238E27FC236}">
-                <a16:creationId xmlns:a16="http://schemas.microsoft.com/office/drawing/2014/main" id="{1A017F44-8778-4827-B646-C047CC491485}"/>
+                <a16:creationId xmlns:a16="http://schemas.microsoft.com/office/drawing/2014/main" id="{D5D0681F-10AE-52E1-AE2E-6204F99903F5}"/>
               </a:ext>
             </a:extLst>
           </p:cNvPr>
@@ -1485,7 +1485,7 @@
           <p:cNvPr id="4" name="06 Closing subtitle 0">
             <a:extLst xmlns:a="http://schemas.openxmlformats.org/drawingml/2006/main">
               <a:ext uri="{FF2B5EF4-FFF2-40B4-BE49-F238E27FC236}">
-                <a16:creationId xmlns:a16="http://schemas.microsoft.com/office/drawing/2014/main" id="{302CA6A2-A8C2-46D3-9EB9-32EEF1184654}"/>
+                <a16:creationId xmlns:a16="http://schemas.microsoft.com/office/drawing/2014/main" id="{885AD679-944C-568D-AFF3-6A3289FBC63C}"/>
               </a:ext>
             </a:extLst>
           </p:cNvPr>
@@ -1538,7 +1538,7 @@
   </p:cSld>
   <p:clrMap bg1="lt1" tx1="dk1" bg2="lt2" tx2="dk2" accent1="accent1" accent2="accent2" accent3="accent3" accent4="accent4" accent5="accent5" accent6="accent6" hlink="hlink" folHlink="folHlink"/>
   <p:sldLayoutIdLst>
-    <p:sldLayoutId xmlns:r="http://schemas.openxmlformats.org/officeDocument/2006/relationships" id="2147483649" r:id="R05691c50a44e4630"/>
+    <p:sldLayoutId xmlns:r="http://schemas.openxmlformats.org/officeDocument/2006/relationships" id="2147483649" r:id="rId1"/>
   </p:sldLayoutIdLst>
   <p:txStyles>
     <p:titleStyle>
@@ -1836,12 +1836,12 @@
   </p:cSld>
   <p:clrMap bg1="lt1" tx1="dk1" bg2="lt2" tx2="dk2" accent1="accent1" accent2="accent2" accent3="accent3" accent4="accent4" accent5="accent5" accent6="accent6" hlink="hlink" folHlink="folHlink"/>
   <p:sldLayoutIdLst>
-    <p:sldLayoutId xmlns:r="http://schemas.openxmlformats.org/officeDocument/2006/relationships" id="2147483651" r:id="R5a711c3fb7344553"/>
-    <p:sldLayoutId xmlns:r="http://schemas.openxmlformats.org/officeDocument/2006/relationships" id="2147483652" r:id="R9e6f3481a1564951"/>
-    <p:sldLayoutId xmlns:r="http://schemas.openxmlformats.org/officeDocument/2006/relationships" id="2147483653" r:id="R8b0301a4580e4f6c"/>
-    <p:sldLayoutId xmlns:r="http://schemas.openxmlformats.org/officeDocument/2006/relationships" id="2147483654" r:id="R8d6147402585481a"/>
-    <p:sldLayoutId xmlns:r="http://schemas.openxmlformats.org/officeDocument/2006/relationships" id="2147483655" r:id="R009bfbe0c2fd4a93"/>
-    <p:sldLayoutId xmlns:r="http://schemas.openxmlformats.org/officeDocument/2006/relationships" id="2147483656" r:id="Rad7985fafd674ef4"/>
+    <p:sldLayoutId xmlns:r="http://schemas.openxmlformats.org/officeDocument/2006/relationships" id="2147483651" r:id="rId1"/>
+    <p:sldLayoutId xmlns:r="http://schemas.openxmlformats.org/officeDocument/2006/relationships" id="2147483652" r:id="rId2"/>
+    <p:sldLayoutId xmlns:r="http://schemas.openxmlformats.org/officeDocument/2006/relationships" id="2147483653" r:id="rId3"/>
+    <p:sldLayoutId xmlns:r="http://schemas.openxmlformats.org/officeDocument/2006/relationships" id="2147483654" r:id="rId4"/>
+    <p:sldLayoutId xmlns:r="http://schemas.openxmlformats.org/officeDocument/2006/relationships" id="2147483655" r:id="rId5"/>
+    <p:sldLayoutId xmlns:r="http://schemas.openxmlformats.org/officeDocument/2006/relationships" id="2147483656" r:id="rId6"/>
   </p:sldLayoutIdLst>
 </p:sldMaster>
 </file>
@@ -2364,7 +2364,7 @@
           <p:nvPr/>
         </p:nvPicPr>
         <p:blipFill>
-          <a:blip xmlns:r="http://schemas.openxmlformats.org/officeDocument/2006/relationships" xmlns:a="http://schemas.openxmlformats.org/drawingml/2006/main" r:embed="Ra3c236d254574384"/>
+          <a:blip xmlns:r="http://schemas.openxmlformats.org/officeDocument/2006/relationships" xmlns:a="http://schemas.openxmlformats.org/drawingml/2006/main" r:embed="rId1"/>
           <a:stretch xmlns:a="http://schemas.openxmlformats.org/drawingml/2006/main"/>
         </p:blipFill>
         <p:spPr>
@@ -2382,7 +2382,7 @@
           <p:cNvPr id="2" name="title-eyebrow">
             <a:extLst xmlns:a="http://schemas.openxmlformats.org/drawingml/2006/main">
               <a:ext uri="{FF2B5EF4-FFF2-40B4-BE49-F238E27FC236}">
-                <a16:creationId xmlns:a16="http://schemas.microsoft.com/office/drawing/2014/main" id="{8A52EA43-166A-4F1C-A171-EDDF5504892A}"/>
+                <a16:creationId xmlns:a16="http://schemas.microsoft.com/office/drawing/2014/main" id="{EADA48C7-92E3-511D-8FB4-24D974404668}"/>
               </a:ext>
             </a:extLst>
           </p:cNvPr>
@@ -2434,7 +2434,7 @@
           <p:cNvPr id="3" name="title-heading">
             <a:extLst xmlns:a="http://schemas.openxmlformats.org/drawingml/2006/main">
               <a:ext uri="{FF2B5EF4-FFF2-40B4-BE49-F238E27FC236}">
-                <a16:creationId xmlns:a16="http://schemas.microsoft.com/office/drawing/2014/main" id="{604778BB-9345-4E8A-8D21-FBA910BA26C6}"/>
+                <a16:creationId xmlns:a16="http://schemas.microsoft.com/office/drawing/2014/main" id="{D34DE48F-E1F3-5F41-8DB7-BC6DF56A67AD}"/>
               </a:ext>
             </a:extLst>
           </p:cNvPr>
@@ -2486,7 +2486,7 @@
           <p:cNvPr id="4" name="title-subtitle">
             <a:extLst xmlns:a="http://schemas.openxmlformats.org/drawingml/2006/main">
               <a:ext uri="{FF2B5EF4-FFF2-40B4-BE49-F238E27FC236}">
-                <a16:creationId xmlns:a16="http://schemas.microsoft.com/office/drawing/2014/main" id="{0F7FC66C-FFD6-4FF4-B7A5-5B242A579262}"/>
+                <a16:creationId xmlns:a16="http://schemas.microsoft.com/office/drawing/2014/main" id="{BD1D932B-6ED0-533C-B450-F68AD75A6B25}"/>
               </a:ext>
             </a:extLst>
           </p:cNvPr>
@@ -2536,7 +2536,7 @@
     </p:spTree>
     <p:extLst>
       <p:ext uri="{BB962C8B-B14F-4D97-AF65-F5344CB8AC3E}">
-        <p14:creationId xmlns:p14="http://schemas.microsoft.com/office/powerpoint/2010/main" val="729140704"/>
+        <p14:creationId xmlns:p14="http://schemas.microsoft.com/office/powerpoint/2010/main" val="1456997942"/>
       </p:ext>
     </p:extLst>
   </p:cSld>
@@ -2567,7 +2567,7 @@
           <p:cNvPr id="5" name="section-step-marker">
             <a:extLst xmlns:a="http://schemas.openxmlformats.org/drawingml/2006/main">
               <a:ext uri="{FF2B5EF4-FFF2-40B4-BE49-F238E27FC236}">
-                <a16:creationId xmlns:a16="http://schemas.microsoft.com/office/drawing/2014/main" id="{2953F1B7-655C-4F1C-8FD3-F1C914C899DA}"/>
+                <a16:creationId xmlns:a16="http://schemas.microsoft.com/office/drawing/2014/main" id="{6A5B9837-AFB3-5A02-BECC-FA0DADC6F3AE}"/>
               </a:ext>
             </a:extLst>
           </p:cNvPr>
@@ -2619,7 +2619,7 @@
           <p:cNvPr id="2" name="section-eyebrow">
             <a:extLst xmlns:a="http://schemas.openxmlformats.org/drawingml/2006/main">
               <a:ext uri="{FF2B5EF4-FFF2-40B4-BE49-F238E27FC236}">
-                <a16:creationId xmlns:a16="http://schemas.microsoft.com/office/drawing/2014/main" id="{A389E2A9-ED82-4052-8358-E254F0B55085}"/>
+                <a16:creationId xmlns:a16="http://schemas.microsoft.com/office/drawing/2014/main" id="{E2BD8628-9B18-58EE-8A36-F197DC6E405E}"/>
               </a:ext>
             </a:extLst>
           </p:cNvPr>
@@ -2671,7 +2671,7 @@
           <p:cNvPr id="3" name="section-heading">
             <a:extLst xmlns:a="http://schemas.openxmlformats.org/drawingml/2006/main">
               <a:ext uri="{FF2B5EF4-FFF2-40B4-BE49-F238E27FC236}">
-                <a16:creationId xmlns:a16="http://schemas.microsoft.com/office/drawing/2014/main" id="{0600C217-C82F-4BAA-BFC3-8E5AC62AC1A8}"/>
+                <a16:creationId xmlns:a16="http://schemas.microsoft.com/office/drawing/2014/main" id="{63351BBF-6896-588A-B67F-E01E50DB21E2}"/>
               </a:ext>
             </a:extLst>
           </p:cNvPr>
@@ -2723,7 +2723,7 @@
           <p:cNvPr id="4" name="section-signal">
             <a:extLst xmlns:a="http://schemas.openxmlformats.org/drawingml/2006/main">
               <a:ext uri="{FF2B5EF4-FFF2-40B4-BE49-F238E27FC236}">
-                <a16:creationId xmlns:a16="http://schemas.microsoft.com/office/drawing/2014/main" id="{F6C73F5A-F299-4263-BDCB-6E23CA1958CE}"/>
+                <a16:creationId xmlns:a16="http://schemas.microsoft.com/office/drawing/2014/main" id="{CF629152-9524-59FC-8BD0-DF4258959489}"/>
               </a:ext>
             </a:extLst>
           </p:cNvPr>
@@ -2752,7 +2752,7 @@
     </p:spTree>
     <p:extLst>
       <p:ext uri="{BB962C8B-B14F-4D97-AF65-F5344CB8AC3E}">
-        <p14:creationId xmlns:p14="http://schemas.microsoft.com/office/powerpoint/2010/main" val="1915195615"/>
+        <p14:creationId xmlns:p14="http://schemas.microsoft.com/office/powerpoint/2010/main" val="1352405784"/>
       </p:ext>
     </p:extLst>
   </p:cSld>
@@ -2783,7 +2783,7 @@
           <p:cNvPr id="18" name="content-eyebrow">
             <a:extLst xmlns:a="http://schemas.openxmlformats.org/drawingml/2006/main">
               <a:ext uri="{FF2B5EF4-FFF2-40B4-BE49-F238E27FC236}">
-                <a16:creationId xmlns:a16="http://schemas.microsoft.com/office/drawing/2014/main" id="{A2A7C0C5-8ADA-4F68-A913-1E3556F5D037}"/>
+                <a16:creationId xmlns:a16="http://schemas.microsoft.com/office/drawing/2014/main" id="{49F4F1FB-1527-560E-9E0C-2D0431413614}"/>
               </a:ext>
             </a:extLst>
           </p:cNvPr>
@@ -2835,7 +2835,7 @@
           <p:cNvPr id="2" name="content-heading">
             <a:extLst xmlns:a="http://schemas.openxmlformats.org/drawingml/2006/main">
               <a:ext uri="{FF2B5EF4-FFF2-40B4-BE49-F238E27FC236}">
-                <a16:creationId xmlns:a16="http://schemas.microsoft.com/office/drawing/2014/main" id="{C488FB2E-4C96-4467-BF0C-FCF30F3040FD}"/>
+                <a16:creationId xmlns:a16="http://schemas.microsoft.com/office/drawing/2014/main" id="{BDA54B1A-B0E7-5197-BA05-AF20B60D8B78}"/>
               </a:ext>
             </a:extLst>
           </p:cNvPr>
@@ -2887,7 +2887,7 @@
           <p:cNvPr id="3" name="content-top-rule">
             <a:extLst xmlns:a="http://schemas.openxmlformats.org/drawingml/2006/main">
               <a:ext uri="{FF2B5EF4-FFF2-40B4-BE49-F238E27FC236}">
-                <a16:creationId xmlns:a16="http://schemas.microsoft.com/office/drawing/2014/main" id="{55AFAC0A-F587-4C8F-828E-724D9DCA8C41}"/>
+                <a16:creationId xmlns:a16="http://schemas.microsoft.com/office/drawing/2014/main" id="{689CAA47-CF3E-5B0E-B6FD-D49EDC325E86}"/>
               </a:ext>
             </a:extLst>
           </p:cNvPr>
@@ -2918,7 +2918,7 @@
           <p:cNvPr id="4" name="content-row-01-number">
             <a:extLst xmlns:a="http://schemas.openxmlformats.org/drawingml/2006/main">
               <a:ext uri="{FF2B5EF4-FFF2-40B4-BE49-F238E27FC236}">
-                <a16:creationId xmlns:a16="http://schemas.microsoft.com/office/drawing/2014/main" id="{C5F2954B-030B-4E16-9E10-9213E644F1A5}"/>
+                <a16:creationId xmlns:a16="http://schemas.microsoft.com/office/drawing/2014/main" id="{50F66AD4-41A8-55FA-8292-7DA342807CA5}"/>
               </a:ext>
             </a:extLst>
           </p:cNvPr>
@@ -2970,7 +2970,7 @@
           <p:cNvPr id="5" name="content-row-01-heading">
             <a:extLst xmlns:a="http://schemas.openxmlformats.org/drawingml/2006/main">
               <a:ext uri="{FF2B5EF4-FFF2-40B4-BE49-F238E27FC236}">
-                <a16:creationId xmlns:a16="http://schemas.microsoft.com/office/drawing/2014/main" id="{156589AC-ADFD-493B-A028-EACCC2745BF4}"/>
+                <a16:creationId xmlns:a16="http://schemas.microsoft.com/office/drawing/2014/main" id="{ED5EC6B2-03BA-561B-867F-4BCD52A79C0A}"/>
               </a:ext>
             </a:extLst>
           </p:cNvPr>
@@ -3022,7 +3022,7 @@
           <p:cNvPr id="6" name="content-row-01-body">
             <a:extLst xmlns:a="http://schemas.openxmlformats.org/drawingml/2006/main">
               <a:ext uri="{FF2B5EF4-FFF2-40B4-BE49-F238E27FC236}">
-                <a16:creationId xmlns:a16="http://schemas.microsoft.com/office/drawing/2014/main" id="{83741572-27A2-4EF1-AD6A-823683837110}"/>
+                <a16:creationId xmlns:a16="http://schemas.microsoft.com/office/drawing/2014/main" id="{70003C15-970A-57A7-BFFD-B4B3E1B7554C}"/>
               </a:ext>
             </a:extLst>
           </p:cNvPr>
@@ -3074,7 +3074,7 @@
           <p:cNvPr id="7" name="content-row-01-rule">
             <a:extLst xmlns:a="http://schemas.openxmlformats.org/drawingml/2006/main">
               <a:ext uri="{FF2B5EF4-FFF2-40B4-BE49-F238E27FC236}">
-                <a16:creationId xmlns:a16="http://schemas.microsoft.com/office/drawing/2014/main" id="{627F3D83-4579-40B5-BB8D-7B1A26EF2796}"/>
+                <a16:creationId xmlns:a16="http://schemas.microsoft.com/office/drawing/2014/main" id="{9B23E3EF-8142-5EA5-A9C7-1712BB23A0E6}"/>
               </a:ext>
             </a:extLst>
           </p:cNvPr>
@@ -3105,7 +3105,7 @@
           <p:cNvPr id="8" name="content-row-02-number">
             <a:extLst xmlns:a="http://schemas.openxmlformats.org/drawingml/2006/main">
               <a:ext uri="{FF2B5EF4-FFF2-40B4-BE49-F238E27FC236}">
-                <a16:creationId xmlns:a16="http://schemas.microsoft.com/office/drawing/2014/main" id="{CA35740B-D890-4255-BA3B-713D45977164}"/>
+                <a16:creationId xmlns:a16="http://schemas.microsoft.com/office/drawing/2014/main" id="{351FAB7C-C5DE-5B70-A98B-F41BE8369EFC}"/>
               </a:ext>
             </a:extLst>
           </p:cNvPr>
@@ -3157,7 +3157,7 @@
           <p:cNvPr id="9" name="content-row-02-heading">
             <a:extLst xmlns:a="http://schemas.openxmlformats.org/drawingml/2006/main">
               <a:ext uri="{FF2B5EF4-FFF2-40B4-BE49-F238E27FC236}">
-                <a16:creationId xmlns:a16="http://schemas.microsoft.com/office/drawing/2014/main" id="{88499F3F-59E0-4B5F-8543-67FE336FF200}"/>
+                <a16:creationId xmlns:a16="http://schemas.microsoft.com/office/drawing/2014/main" id="{02D9D106-C56A-587D-A36A-586AE9C12115}"/>
               </a:ext>
             </a:extLst>
           </p:cNvPr>
@@ -3209,7 +3209,7 @@
           <p:cNvPr id="10" name="content-row-02-body">
             <a:extLst xmlns:a="http://schemas.openxmlformats.org/drawingml/2006/main">
               <a:ext uri="{FF2B5EF4-FFF2-40B4-BE49-F238E27FC236}">
-                <a16:creationId xmlns:a16="http://schemas.microsoft.com/office/drawing/2014/main" id="{D641EF92-368A-4FD4-B7CA-46F0DC76FB7A}"/>
+                <a16:creationId xmlns:a16="http://schemas.microsoft.com/office/drawing/2014/main" id="{A39D6866-48EF-5287-BD2E-25F3F2DCEC2F}"/>
               </a:ext>
             </a:extLst>
           </p:cNvPr>
@@ -3261,7 +3261,7 @@
           <p:cNvPr id="11" name="content-row-02-rule">
             <a:extLst xmlns:a="http://schemas.openxmlformats.org/drawingml/2006/main">
               <a:ext uri="{FF2B5EF4-FFF2-40B4-BE49-F238E27FC236}">
-                <a16:creationId xmlns:a16="http://schemas.microsoft.com/office/drawing/2014/main" id="{0794C04D-EC64-4326-B7BC-CC7B8E83760A}"/>
+                <a16:creationId xmlns:a16="http://schemas.microsoft.com/office/drawing/2014/main" id="{6C302D8E-7C90-51A3-8310-FB8C7A09D774}"/>
               </a:ext>
             </a:extLst>
           </p:cNvPr>
@@ -3292,7 +3292,7 @@
           <p:cNvPr id="12" name="content-row-03-number">
             <a:extLst xmlns:a="http://schemas.openxmlformats.org/drawingml/2006/main">
               <a:ext uri="{FF2B5EF4-FFF2-40B4-BE49-F238E27FC236}">
-                <a16:creationId xmlns:a16="http://schemas.microsoft.com/office/drawing/2014/main" id="{BAFAB70C-416B-47CF-8E53-6683C3D4D0F1}"/>
+                <a16:creationId xmlns:a16="http://schemas.microsoft.com/office/drawing/2014/main" id="{641345D4-1399-5DC3-81E8-10B89799D099}"/>
               </a:ext>
             </a:extLst>
           </p:cNvPr>
@@ -3344,7 +3344,7 @@
           <p:cNvPr id="13" name="content-row-03-heading">
             <a:extLst xmlns:a="http://schemas.openxmlformats.org/drawingml/2006/main">
               <a:ext uri="{FF2B5EF4-FFF2-40B4-BE49-F238E27FC236}">
-                <a16:creationId xmlns:a16="http://schemas.microsoft.com/office/drawing/2014/main" id="{3AE70FC5-4189-41E8-959D-990199E1E958}"/>
+                <a16:creationId xmlns:a16="http://schemas.microsoft.com/office/drawing/2014/main" id="{A0F6DAE0-AD1C-5849-9028-42973277C4F9}"/>
               </a:ext>
             </a:extLst>
           </p:cNvPr>
@@ -3396,7 +3396,7 @@
           <p:cNvPr id="14" name="content-row-03-body">
             <a:extLst xmlns:a="http://schemas.openxmlformats.org/drawingml/2006/main">
               <a:ext uri="{FF2B5EF4-FFF2-40B4-BE49-F238E27FC236}">
-                <a16:creationId xmlns:a16="http://schemas.microsoft.com/office/drawing/2014/main" id="{C679D83F-F158-47F4-BF36-98D5A633222A}"/>
+                <a16:creationId xmlns:a16="http://schemas.microsoft.com/office/drawing/2014/main" id="{54048FFA-6381-539D-9B18-8A502ED664AB}"/>
               </a:ext>
             </a:extLst>
           </p:cNvPr>
@@ -3448,7 +3448,7 @@
           <p:cNvPr id="15" name="content-row-03-rule">
             <a:extLst xmlns:a="http://schemas.openxmlformats.org/drawingml/2006/main">
               <a:ext uri="{FF2B5EF4-FFF2-40B4-BE49-F238E27FC236}">
-                <a16:creationId xmlns:a16="http://schemas.microsoft.com/office/drawing/2014/main" id="{13F30FDF-F5C0-4794-840C-385ED7F68F12}"/>
+                <a16:creationId xmlns:a16="http://schemas.microsoft.com/office/drawing/2014/main" id="{A853A0F3-F792-5A73-AA51-DD083073C84A}"/>
               </a:ext>
             </a:extLst>
           </p:cNvPr>
@@ -3479,7 +3479,7 @@
           <p:cNvPr id="16" name="footer-wordmark-{{FOLIO}}">
             <a:extLst xmlns:a="http://schemas.openxmlformats.org/drawingml/2006/main">
               <a:ext uri="{FF2B5EF4-FFF2-40B4-BE49-F238E27FC236}">
-                <a16:creationId xmlns:a16="http://schemas.microsoft.com/office/drawing/2014/main" id="{0D90F6D6-EBFE-44F8-A9D2-F6F01B5BA8E8}"/>
+                <a16:creationId xmlns:a16="http://schemas.microsoft.com/office/drawing/2014/main" id="{1799B566-9399-54B5-84BD-D7F6BAD97093}"/>
               </a:ext>
             </a:extLst>
           </p:cNvPr>
@@ -3531,7 +3531,7 @@
           <p:cNvPr id="17" name="footer-folio-{{FOLIO}}">
             <a:extLst xmlns:a="http://schemas.openxmlformats.org/drawingml/2006/main">
               <a:ext uri="{FF2B5EF4-FFF2-40B4-BE49-F238E27FC236}">
-                <a16:creationId xmlns:a16="http://schemas.microsoft.com/office/drawing/2014/main" id="{06148F06-47AB-47AC-9539-7CEBF19C652D}"/>
+                <a16:creationId xmlns:a16="http://schemas.microsoft.com/office/drawing/2014/main" id="{B12836D9-877E-5A4E-A9C0-1B0D8220CFC5}"/>
               </a:ext>
             </a:extLst>
           </p:cNvPr>
@@ -3581,7 +3581,7 @@
     </p:spTree>
     <p:extLst>
       <p:ext uri="{BB962C8B-B14F-4D97-AF65-F5344CB8AC3E}">
-        <p14:creationId xmlns:p14="http://schemas.microsoft.com/office/powerpoint/2010/main" val="2000775771"/>
+        <p14:creationId xmlns:p14="http://schemas.microsoft.com/office/powerpoint/2010/main" val="1583880013"/>
       </p:ext>
     </p:extLst>
   </p:cSld>
@@ -3612,7 +3612,7 @@
           <p:cNvPr id="17" name="evidence-eyebrow">
             <a:extLst xmlns:a="http://schemas.openxmlformats.org/drawingml/2006/main">
               <a:ext uri="{FF2B5EF4-FFF2-40B4-BE49-F238E27FC236}">
-                <a16:creationId xmlns:a16="http://schemas.microsoft.com/office/drawing/2014/main" id="{7BDFAE34-0E68-40F2-B702-5ABAB4CF73A5}"/>
+                <a16:creationId xmlns:a16="http://schemas.microsoft.com/office/drawing/2014/main" id="{E35C445F-6442-5B0B-9591-45D894EE8B25}"/>
               </a:ext>
             </a:extLst>
           </p:cNvPr>
@@ -3664,7 +3664,7 @@
           <p:cNvPr id="2" name="evidence-heading">
             <a:extLst xmlns:a="http://schemas.openxmlformats.org/drawingml/2006/main">
               <a:ext uri="{FF2B5EF4-FFF2-40B4-BE49-F238E27FC236}">
-                <a16:creationId xmlns:a16="http://schemas.microsoft.com/office/drawing/2014/main" id="{5A69978A-EC09-42E9-BEBD-E848E75FC33D}"/>
+                <a16:creationId xmlns:a16="http://schemas.microsoft.com/office/drawing/2014/main" id="{0FE16208-7B54-5CD1-AB6A-276670DFE6D1}"/>
               </a:ext>
             </a:extLst>
           </p:cNvPr>
@@ -3716,7 +3716,7 @@
           <p:cNvPr id="3" name="evidence-ONE-rule">
             <a:extLst xmlns:a="http://schemas.openxmlformats.org/drawingml/2006/main">
               <a:ext uri="{FF2B5EF4-FFF2-40B4-BE49-F238E27FC236}">
-                <a16:creationId xmlns:a16="http://schemas.microsoft.com/office/drawing/2014/main" id="{1F96B506-A281-41D3-9FB2-D0351D53B901}"/>
+                <a16:creationId xmlns:a16="http://schemas.microsoft.com/office/drawing/2014/main" id="{DA46C44D-9189-5B0C-8900-CF0B3BE78902}"/>
               </a:ext>
             </a:extLst>
           </p:cNvPr>
@@ -3747,7 +3747,7 @@
           <p:cNvPr id="4" name="evidence-ONE-value">
             <a:extLst xmlns:a="http://schemas.openxmlformats.org/drawingml/2006/main">
               <a:ext uri="{FF2B5EF4-FFF2-40B4-BE49-F238E27FC236}">
-                <a16:creationId xmlns:a16="http://schemas.microsoft.com/office/drawing/2014/main" id="{4B55BEA1-CCFF-4315-BA2D-00AA9066C1D9}"/>
+                <a16:creationId xmlns:a16="http://schemas.microsoft.com/office/drawing/2014/main" id="{AA19070C-37D5-5B71-B577-E011168C6629}"/>
               </a:ext>
             </a:extLst>
           </p:cNvPr>
@@ -3799,7 +3799,7 @@
           <p:cNvPr id="5" name="evidence-ONE-claim">
             <a:extLst xmlns:a="http://schemas.openxmlformats.org/drawingml/2006/main">
               <a:ext uri="{FF2B5EF4-FFF2-40B4-BE49-F238E27FC236}">
-                <a16:creationId xmlns:a16="http://schemas.microsoft.com/office/drawing/2014/main" id="{CE6BC6FF-5982-47CE-94D4-55C1841EC5FC}"/>
+                <a16:creationId xmlns:a16="http://schemas.microsoft.com/office/drawing/2014/main" id="{58AB29AC-96A7-584A-976C-C15BC8C4F229}"/>
               </a:ext>
             </a:extLst>
           </p:cNvPr>
@@ -3851,7 +3851,7 @@
           <p:cNvPr id="6" name="evidence-ONE-source">
             <a:extLst xmlns:a="http://schemas.openxmlformats.org/drawingml/2006/main">
               <a:ext uri="{FF2B5EF4-FFF2-40B4-BE49-F238E27FC236}">
-                <a16:creationId xmlns:a16="http://schemas.microsoft.com/office/drawing/2014/main" id="{7DABFA8E-D15F-444B-9E60-7838086A69A5}"/>
+                <a16:creationId xmlns:a16="http://schemas.microsoft.com/office/drawing/2014/main" id="{4C181F75-9E91-5A66-8B93-ABC10690D5F7}"/>
               </a:ext>
             </a:extLst>
           </p:cNvPr>
@@ -3903,7 +3903,7 @@
           <p:cNvPr id="7" name="evidence-TWO-rule">
             <a:extLst xmlns:a="http://schemas.openxmlformats.org/drawingml/2006/main">
               <a:ext uri="{FF2B5EF4-FFF2-40B4-BE49-F238E27FC236}">
-                <a16:creationId xmlns:a16="http://schemas.microsoft.com/office/drawing/2014/main" id="{5F88BF7D-0450-4DCD-907D-FB6ADDDC2598}"/>
+                <a16:creationId xmlns:a16="http://schemas.microsoft.com/office/drawing/2014/main" id="{52AF0577-26C1-5F13-9B93-164CDC166F1D}"/>
               </a:ext>
             </a:extLst>
           </p:cNvPr>
@@ -3934,7 +3934,7 @@
           <p:cNvPr id="8" name="evidence-TWO-value">
             <a:extLst xmlns:a="http://schemas.openxmlformats.org/drawingml/2006/main">
               <a:ext uri="{FF2B5EF4-FFF2-40B4-BE49-F238E27FC236}">
-                <a16:creationId xmlns:a16="http://schemas.microsoft.com/office/drawing/2014/main" id="{495F2654-3460-4EC8-B868-F1D7AE8B3A57}"/>
+                <a16:creationId xmlns:a16="http://schemas.microsoft.com/office/drawing/2014/main" id="{FEF79354-7449-5DA9-B45B-AFA8B066A943}"/>
               </a:ext>
             </a:extLst>
           </p:cNvPr>
@@ -3986,7 +3986,7 @@
           <p:cNvPr id="9" name="evidence-TWO-claim">
             <a:extLst xmlns:a="http://schemas.openxmlformats.org/drawingml/2006/main">
               <a:ext uri="{FF2B5EF4-FFF2-40B4-BE49-F238E27FC236}">
-                <a16:creationId xmlns:a16="http://schemas.microsoft.com/office/drawing/2014/main" id="{1577AB4D-C3B6-47BE-8A75-4DF8F2B4AFD5}"/>
+                <a16:creationId xmlns:a16="http://schemas.microsoft.com/office/drawing/2014/main" id="{9CBEB932-1493-54AD-857D-D1D64FDE22B5}"/>
               </a:ext>
             </a:extLst>
           </p:cNvPr>
@@ -4038,7 +4038,7 @@
           <p:cNvPr id="10" name="evidence-TWO-source">
             <a:extLst xmlns:a="http://schemas.openxmlformats.org/drawingml/2006/main">
               <a:ext uri="{FF2B5EF4-FFF2-40B4-BE49-F238E27FC236}">
-                <a16:creationId xmlns:a16="http://schemas.microsoft.com/office/drawing/2014/main" id="{38C51858-675B-4721-BD64-09B8213A5F6B}"/>
+                <a16:creationId xmlns:a16="http://schemas.microsoft.com/office/drawing/2014/main" id="{E8B636AF-75EE-5709-AE08-6FDF1143A108}"/>
               </a:ext>
             </a:extLst>
           </p:cNvPr>
@@ -4090,7 +4090,7 @@
           <p:cNvPr id="11" name="evidence-THREE-rule">
             <a:extLst xmlns:a="http://schemas.openxmlformats.org/drawingml/2006/main">
               <a:ext uri="{FF2B5EF4-FFF2-40B4-BE49-F238E27FC236}">
-                <a16:creationId xmlns:a16="http://schemas.microsoft.com/office/drawing/2014/main" id="{12128C4C-0EB6-4111-83F4-E43F0BA6468D}"/>
+                <a16:creationId xmlns:a16="http://schemas.microsoft.com/office/drawing/2014/main" id="{6AE56476-D154-5DF7-9E76-8FDBFFD3B855}"/>
               </a:ext>
             </a:extLst>
           </p:cNvPr>
@@ -4121,7 +4121,7 @@
           <p:cNvPr id="12" name="evidence-THREE-value">
             <a:extLst xmlns:a="http://schemas.openxmlformats.org/drawingml/2006/main">
               <a:ext uri="{FF2B5EF4-FFF2-40B4-BE49-F238E27FC236}">
-                <a16:creationId xmlns:a16="http://schemas.microsoft.com/office/drawing/2014/main" id="{9D0AFAF0-2561-48DF-A569-31F379EFFF5D}"/>
+                <a16:creationId xmlns:a16="http://schemas.microsoft.com/office/drawing/2014/main" id="{4D7DE544-D56D-5FFD-A3BA-97666A35FB4A}"/>
               </a:ext>
             </a:extLst>
           </p:cNvPr>
@@ -4173,7 +4173,7 @@
           <p:cNvPr id="13" name="evidence-THREE-claim">
             <a:extLst xmlns:a="http://schemas.openxmlformats.org/drawingml/2006/main">
               <a:ext uri="{FF2B5EF4-FFF2-40B4-BE49-F238E27FC236}">
-                <a16:creationId xmlns:a16="http://schemas.microsoft.com/office/drawing/2014/main" id="{3DD93D0C-565D-47D7-9532-557D86247E4E}"/>
+                <a16:creationId xmlns:a16="http://schemas.microsoft.com/office/drawing/2014/main" id="{91561FFF-A078-5026-8CC3-783BDC1B5829}"/>
               </a:ext>
             </a:extLst>
           </p:cNvPr>
@@ -4225,7 +4225,7 @@
           <p:cNvPr id="14" name="evidence-THREE-source">
             <a:extLst xmlns:a="http://schemas.openxmlformats.org/drawingml/2006/main">
               <a:ext uri="{FF2B5EF4-FFF2-40B4-BE49-F238E27FC236}">
-                <a16:creationId xmlns:a16="http://schemas.microsoft.com/office/drawing/2014/main" id="{84B31344-B6A5-431B-B255-CF3E6E1DB370}"/>
+                <a16:creationId xmlns:a16="http://schemas.microsoft.com/office/drawing/2014/main" id="{CDB2B932-21CB-50A5-ACF8-99BB96A786D9}"/>
               </a:ext>
             </a:extLst>
           </p:cNvPr>
@@ -4277,7 +4277,7 @@
           <p:cNvPr id="15" name="footer-wordmark-{{FOLIO}}">
             <a:extLst xmlns:a="http://schemas.openxmlformats.org/drawingml/2006/main">
               <a:ext uri="{FF2B5EF4-FFF2-40B4-BE49-F238E27FC236}">
-                <a16:creationId xmlns:a16="http://schemas.microsoft.com/office/drawing/2014/main" id="{7884120F-D192-4A1F-B92B-D50F6A0F388A}"/>
+                <a16:creationId xmlns:a16="http://schemas.microsoft.com/office/drawing/2014/main" id="{38A128B0-3040-5C28-8628-ACAF1B08836F}"/>
               </a:ext>
             </a:extLst>
           </p:cNvPr>
@@ -4329,7 +4329,7 @@
           <p:cNvPr id="16" name="footer-folio-{{FOLIO}}">
             <a:extLst xmlns:a="http://schemas.openxmlformats.org/drawingml/2006/main">
               <a:ext uri="{FF2B5EF4-FFF2-40B4-BE49-F238E27FC236}">
-                <a16:creationId xmlns:a16="http://schemas.microsoft.com/office/drawing/2014/main" id="{E3539AEA-500F-4276-BD37-E2F746F75A29}"/>
+                <a16:creationId xmlns:a16="http://schemas.microsoft.com/office/drawing/2014/main" id="{A1FE5AF1-F69A-5EEA-A86F-0BD55DC52B5F}"/>
               </a:ext>
             </a:extLst>
           </p:cNvPr>
@@ -4379,7 +4379,7 @@
     </p:spTree>
     <p:extLst>
       <p:ext uri="{BB962C8B-B14F-4D97-AF65-F5344CB8AC3E}">
-        <p14:creationId xmlns:p14="http://schemas.microsoft.com/office/powerpoint/2010/main" val="219139856"/>
+        <p14:creationId xmlns:p14="http://schemas.microsoft.com/office/powerpoint/2010/main" val="1468067762"/>
       </p:ext>
     </p:extLst>
   </p:cSld>
@@ -4410,7 +4410,7 @@
           <p:cNvPr id="5" name="quote-mark">
             <a:extLst xmlns:a="http://schemas.openxmlformats.org/drawingml/2006/main">
               <a:ext uri="{FF2B5EF4-FFF2-40B4-BE49-F238E27FC236}">
-                <a16:creationId xmlns:a16="http://schemas.microsoft.com/office/drawing/2014/main" id="{6B509644-330B-4CE9-86BB-696707F53426}"/>
+                <a16:creationId xmlns:a16="http://schemas.microsoft.com/office/drawing/2014/main" id="{C76803E3-23A3-5A7E-8531-43AD9595663A}"/>
               </a:ext>
             </a:extLst>
           </p:cNvPr>
@@ -4462,7 +4462,7 @@
           <p:cNvPr id="2" name="quote-text">
             <a:extLst xmlns:a="http://schemas.openxmlformats.org/drawingml/2006/main">
               <a:ext uri="{FF2B5EF4-FFF2-40B4-BE49-F238E27FC236}">
-                <a16:creationId xmlns:a16="http://schemas.microsoft.com/office/drawing/2014/main" id="{6C81B1F8-7884-4B6F-91A7-2A16C2BB250E}"/>
+                <a16:creationId xmlns:a16="http://schemas.microsoft.com/office/drawing/2014/main" id="{999A823E-FC6C-504E-A213-B4AD38CF3E8C}"/>
               </a:ext>
             </a:extLst>
           </p:cNvPr>
@@ -4514,7 +4514,7 @@
           <p:cNvPr id="3" name="quote-attribution">
             <a:extLst xmlns:a="http://schemas.openxmlformats.org/drawingml/2006/main">
               <a:ext uri="{FF2B5EF4-FFF2-40B4-BE49-F238E27FC236}">
-                <a16:creationId xmlns:a16="http://schemas.microsoft.com/office/drawing/2014/main" id="{82982954-758B-4264-80B6-32F9CC37B049}"/>
+                <a16:creationId xmlns:a16="http://schemas.microsoft.com/office/drawing/2014/main" id="{F651A96E-597E-5724-BBF9-F32B85F34463}"/>
               </a:ext>
             </a:extLst>
           </p:cNvPr>
@@ -4566,7 +4566,7 @@
           <p:cNvPr id="4" name="quote-source">
             <a:extLst xmlns:a="http://schemas.openxmlformats.org/drawingml/2006/main">
               <a:ext uri="{FF2B5EF4-FFF2-40B4-BE49-F238E27FC236}">
-                <a16:creationId xmlns:a16="http://schemas.microsoft.com/office/drawing/2014/main" id="{8CEFEAA3-9319-4AAB-AC29-02ACB2E00CC9}"/>
+                <a16:creationId xmlns:a16="http://schemas.microsoft.com/office/drawing/2014/main" id="{6F6CC0E8-4ED3-531D-B87A-3B206667C3A4}"/>
               </a:ext>
             </a:extLst>
           </p:cNvPr>
@@ -4616,7 +4616,7 @@
     </p:spTree>
     <p:extLst>
       <p:ext uri="{BB962C8B-B14F-4D97-AF65-F5344CB8AC3E}">
-        <p14:creationId xmlns:p14="http://schemas.microsoft.com/office/powerpoint/2010/main" val="1441691486"/>
+        <p14:creationId xmlns:p14="http://schemas.microsoft.com/office/powerpoint/2010/main" val="628303973"/>
       </p:ext>
     </p:extLst>
   </p:cSld>
@@ -4651,7 +4651,7 @@
           <p:nvPr/>
         </p:nvPicPr>
         <p:blipFill>
-          <a:blip xmlns:r="http://schemas.openxmlformats.org/officeDocument/2006/relationships" xmlns:a="http://schemas.openxmlformats.org/drawingml/2006/main" r:embed="R5aff549c9fb040be"/>
+          <a:blip xmlns:r="http://schemas.openxmlformats.org/officeDocument/2006/relationships" xmlns:a="http://schemas.openxmlformats.org/drawingml/2006/main" r:embed="rId1"/>
           <a:stretch xmlns:a="http://schemas.openxmlformats.org/drawingml/2006/main"/>
         </p:blipFill>
         <p:spPr>
@@ -4669,7 +4669,7 @@
           <p:cNvPr id="2" name="closing-heading">
             <a:extLst xmlns:a="http://schemas.openxmlformats.org/drawingml/2006/main">
               <a:ext uri="{FF2B5EF4-FFF2-40B4-BE49-F238E27FC236}">
-                <a16:creationId xmlns:a16="http://schemas.microsoft.com/office/drawing/2014/main" id="{00219257-4FBB-4247-9992-AF651A756426}"/>
+                <a16:creationId xmlns:a16="http://schemas.microsoft.com/office/drawing/2014/main" id="{2E36E15A-7002-5558-B6C3-80324026504F}"/>
               </a:ext>
             </a:extLst>
           </p:cNvPr>
@@ -4721,7 +4721,7 @@
           <p:cNvPr id="3" name="closing-action">
             <a:extLst xmlns:a="http://schemas.openxmlformats.org/drawingml/2006/main">
               <a:ext uri="{FF2B5EF4-FFF2-40B4-BE49-F238E27FC236}">
-                <a16:creationId xmlns:a16="http://schemas.microsoft.com/office/drawing/2014/main" id="{FE8C56E9-936F-4380-944F-DA187AC81BE8}"/>
+                <a16:creationId xmlns:a16="http://schemas.microsoft.com/office/drawing/2014/main" id="{2FC8B57D-D05A-5724-AB90-4789829F2C09}"/>
               </a:ext>
             </a:extLst>
           </p:cNvPr>
@@ -4752,7 +4752,7 @@
           <p:cNvPr id="4" name="closing-action-label">
             <a:extLst xmlns:a="http://schemas.openxmlformats.org/drawingml/2006/main">
               <a:ext uri="{FF2B5EF4-FFF2-40B4-BE49-F238E27FC236}">
-                <a16:creationId xmlns:a16="http://schemas.microsoft.com/office/drawing/2014/main" id="{41CA16BD-C3FF-4727-9E6F-ECA6082E5462}"/>
+                <a16:creationId xmlns:a16="http://schemas.microsoft.com/office/drawing/2014/main" id="{AC7C8004-4394-54A5-A0A7-03145DAEDACB}"/>
               </a:ext>
             </a:extLst>
           </p:cNvPr>
@@ -4804,7 +4804,7 @@
           <p:cNvPr id="5" name="closing-action-signal">
             <a:extLst xmlns:a="http://schemas.openxmlformats.org/drawingml/2006/main">
               <a:ext uri="{FF2B5EF4-FFF2-40B4-BE49-F238E27FC236}">
-                <a16:creationId xmlns:a16="http://schemas.microsoft.com/office/drawing/2014/main" id="{BA6A24FA-C7D0-40B2-8695-F4652FCE988D}"/>
+                <a16:creationId xmlns:a16="http://schemas.microsoft.com/office/drawing/2014/main" id="{4EED0E5E-60A7-5329-9FDF-2A8F989E6798}"/>
               </a:ext>
             </a:extLst>
           </p:cNvPr>
@@ -4835,7 +4835,7 @@
           <p:cNvPr id="6" name="closing-contact">
             <a:extLst xmlns:a="http://schemas.openxmlformats.org/drawingml/2006/main">
               <a:ext uri="{FF2B5EF4-FFF2-40B4-BE49-F238E27FC236}">
-                <a16:creationId xmlns:a16="http://schemas.microsoft.com/office/drawing/2014/main" id="{5C7C5C10-BEED-4251-8FA9-2789C10C6654}"/>
+                <a16:creationId xmlns:a16="http://schemas.microsoft.com/office/drawing/2014/main" id="{3443E47E-6AE9-58D5-9E87-F47073A07749}"/>
               </a:ext>
             </a:extLst>
           </p:cNvPr>
@@ -4887,7 +4887,7 @@
           <p:cNvPr id="7" name="footer-wordmark-{{FOLIO}}">
             <a:extLst xmlns:a="http://schemas.openxmlformats.org/drawingml/2006/main">
               <a:ext uri="{FF2B5EF4-FFF2-40B4-BE49-F238E27FC236}">
-                <a16:creationId xmlns:a16="http://schemas.microsoft.com/office/drawing/2014/main" id="{07C58FCB-D853-43F2-A29F-0A3E6AD82339}"/>
+                <a16:creationId xmlns:a16="http://schemas.microsoft.com/office/drawing/2014/main" id="{4A99FAD8-F221-5346-8B17-15D98EA05B93}"/>
               </a:ext>
             </a:extLst>
           </p:cNvPr>
@@ -4939,7 +4939,7 @@
           <p:cNvPr id="8" name="footer-folio-{{FOLIO}}">
             <a:extLst xmlns:a="http://schemas.openxmlformats.org/drawingml/2006/main">
               <a:ext uri="{FF2B5EF4-FFF2-40B4-BE49-F238E27FC236}">
-                <a16:creationId xmlns:a16="http://schemas.microsoft.com/office/drawing/2014/main" id="{60A12237-FEF7-422D-8D64-27C9FFA0858B}"/>
+                <a16:creationId xmlns:a16="http://schemas.microsoft.com/office/drawing/2014/main" id="{C34121BC-EFE0-5BE5-A957-6845D2541FA9}"/>
               </a:ext>
             </a:extLst>
           </p:cNvPr>
@@ -4989,7 +4989,7 @@
     </p:spTree>
     <p:extLst>
       <p:ext uri="{BB962C8B-B14F-4D97-AF65-F5344CB8AC3E}">
-        <p14:creationId xmlns:p14="http://schemas.microsoft.com/office/powerpoint/2010/main" val="1725745275"/>
+        <p14:creationId xmlns:p14="http://schemas.microsoft.com/office/powerpoint/2010/main" val="2091892746"/>
       </p:ext>
     </p:extLst>
   </p:cSld>
